--- a/content/W00/D4/slides/C2_W00_D04_half2_STUDENT.pptx
+++ b/content/W00/D4/slides/C2_W00_D04_half2_STUDENT.pptx
@@ -5139,14 +5139,14 @@
       </p:sp>
       <p:pic>
         <p:nvPicPr>
-          <p:cNvPr id="6" name="Picture 5" descr="14bd9738dbc27f07.png"/>
+          <p:cNvPr id="6" name="Picture 5" descr="2ee538a1f5264345.png"/>
           <p:cNvPicPr>
             <a:picLocks noChangeAspect="1"/>
           </p:cNvPicPr>
           <p:nvPr/>
         </p:nvPicPr>
         <p:blipFill>
-          <a:blip r:embed="rId2"/>
+          <a:blip r:embed="rId3"/>
           <a:stretch>
             <a:fillRect/>
           </a:stretch>
@@ -7140,14 +7140,14 @@
       </p:sp>
       <p:pic>
         <p:nvPicPr>
-          <p:cNvPr id="6" name="Picture 5" descr="7cb201793a2da0e9.png"/>
+          <p:cNvPr id="6" name="Picture 5" descr="f7eecace1fc43548.png"/>
           <p:cNvPicPr>
             <a:picLocks noChangeAspect="1"/>
           </p:cNvPicPr>
           <p:nvPr/>
         </p:nvPicPr>
         <p:blipFill>
-          <a:blip r:embed="rId2"/>
+          <a:blip r:embed="rId3"/>
           <a:stretch>
             <a:fillRect/>
           </a:stretch>
@@ -8513,14 +8513,14 @@
       </p:sp>
       <p:pic>
         <p:nvPicPr>
-          <p:cNvPr id="7" name="Picture 6" descr="477b12daa96b0bf8.png"/>
+          <p:cNvPr id="7" name="Picture 6" descr="af89cf7bfcb4866a.png"/>
           <p:cNvPicPr>
             <a:picLocks noChangeAspect="1"/>
           </p:cNvPicPr>
           <p:nvPr/>
         </p:nvPicPr>
         <p:blipFill>
-          <a:blip r:embed="rId2"/>
+          <a:blip r:embed="rId3"/>
           <a:stretch>
             <a:fillRect/>
           </a:stretch>
@@ -9876,14 +9876,14 @@
       </p:sp>
       <p:pic>
         <p:nvPicPr>
-          <p:cNvPr id="6" name="Picture 5" descr="0ec68df931861b02.png"/>
+          <p:cNvPr id="6" name="Picture 5" descr="18edf878ac885920.png"/>
           <p:cNvPicPr>
             <a:picLocks noChangeAspect="1"/>
           </p:cNvPicPr>
           <p:nvPr/>
         </p:nvPicPr>
         <p:blipFill>
-          <a:blip r:embed="rId2"/>
+          <a:blip r:embed="rId3"/>
           <a:stretch>
             <a:fillRect/>
           </a:stretch>
@@ -12591,14 +12591,14 @@
       </p:sp>
       <p:pic>
         <p:nvPicPr>
-          <p:cNvPr id="7" name="Picture 6" descr="e66b1f03be51cc52.png"/>
+          <p:cNvPr id="7" name="Picture 6" descr="48560d10205a9c1d.png"/>
           <p:cNvPicPr>
             <a:picLocks noChangeAspect="1"/>
           </p:cNvPicPr>
           <p:nvPr/>
         </p:nvPicPr>
         <p:blipFill>
-          <a:blip r:embed="rId2"/>
+          <a:blip r:embed="rId3"/>
           <a:stretch>
             <a:fillRect/>
           </a:stretch>

--- a/content/W00/D4/slides/C2_W00_D04_half2_STUDENT.pptx
+++ b/content/W00/D4/slides/C2_W00_D04_half2_STUDENT.pptx
@@ -7140,7 +7140,7 @@
       </p:sp>
       <p:pic>
         <p:nvPicPr>
-          <p:cNvPr id="6" name="Picture 5" descr="f7eecace1fc43548.png"/>
+          <p:cNvPr id="6" name="Picture 5" descr="4cdfd264be8ed294.png"/>
           <p:cNvPicPr>
             <a:picLocks noChangeAspect="1"/>
           </p:cNvPicPr>
@@ -12591,7 +12591,7 @@
       </p:sp>
       <p:pic>
         <p:nvPicPr>
-          <p:cNvPr id="7" name="Picture 6" descr="48560d10205a9c1d.png"/>
+          <p:cNvPr id="7" name="Picture 6" descr="ff314a20acd5aac3.png"/>
           <p:cNvPicPr>
             <a:picLocks noChangeAspect="1"/>
           </p:cNvPicPr>
